--- a/tests/benchmark/architectural_slides/case_027_metric_cards_only/output.pptx
+++ b/tests/benchmark/architectural_slides/case_027_metric_cards_only/output.pptx
@@ -910,7 +910,7 @@
         <p:spPr>
           <a:xfrm>
             <a:off x="640080" y="411480"/>
-            <a:ext cx="7863840" cy="457200"/>
+            <a:ext cx="7863840" cy="601218"/>
           </a:xfrm>
           <a:prstGeom prst="rect">
             <a:avLst/>
@@ -948,7 +948,7 @@
         </p:nvSpPr>
         <p:spPr>
           <a:xfrm>
-            <a:off x="640080" y="906780"/>
+            <a:off x="640080" y="1050798"/>
             <a:ext cx="7863840" cy="365760"/>
           </a:xfrm>
           <a:prstGeom prst="rect">
@@ -987,8 +987,8 @@
         </p:nvSpPr>
         <p:spPr>
           <a:xfrm>
-            <a:off x="640080" y="1348740"/>
-            <a:ext cx="2545080" cy="1327404"/>
+            <a:off x="640080" y="1492758"/>
+            <a:ext cx="2545080" cy="1255395"/>
           </a:xfrm>
           <a:prstGeom prst="rect">
             <a:avLst/>
@@ -1026,8 +1026,8 @@
         </p:nvSpPr>
         <p:spPr>
           <a:xfrm>
-            <a:off x="3299460" y="1348740"/>
-            <a:ext cx="2545080" cy="1327404"/>
+            <a:off x="3299460" y="1492758"/>
+            <a:ext cx="2545080" cy="1255395"/>
           </a:xfrm>
           <a:prstGeom prst="rect">
             <a:avLst/>
@@ -1065,8 +1065,8 @@
         </p:nvSpPr>
         <p:spPr>
           <a:xfrm>
-            <a:off x="5958840" y="1348740"/>
-            <a:ext cx="2545080" cy="1327404"/>
+            <a:off x="5958840" y="1492758"/>
+            <a:ext cx="2545080" cy="1255395"/>
           </a:xfrm>
           <a:prstGeom prst="rect">
             <a:avLst/>
@@ -1104,8 +1104,8 @@
         </p:nvSpPr>
         <p:spPr>
           <a:xfrm>
-            <a:off x="640080" y="2790444"/>
-            <a:ext cx="2545080" cy="1327404"/>
+            <a:off x="640080" y="2862453"/>
+            <a:ext cx="2545080" cy="1255395"/>
           </a:xfrm>
           <a:prstGeom prst="rect">
             <a:avLst/>
@@ -1143,8 +1143,8 @@
         </p:nvSpPr>
         <p:spPr>
           <a:xfrm>
-            <a:off x="3299460" y="2790444"/>
-            <a:ext cx="2545080" cy="1327404"/>
+            <a:off x="3299460" y="2862453"/>
+            <a:ext cx="2545080" cy="1255395"/>
           </a:xfrm>
           <a:prstGeom prst="rect">
             <a:avLst/>

--- a/tests/benchmark/architectural_slides/case_027_metric_cards_only/output.pptx
+++ b/tests/benchmark/architectural_slides/case_027_metric_cards_only/output.pptx
@@ -981,7 +981,32 @@
       </p:sp>
       <p:sp>
         <p:nvSpPr>
-          <p:cNvPr id="4" name="Text 2"/>
+          <p:cNvPr id="4" name="Shape 2"/>
+          <p:cNvSpPr/>
+          <p:nvPr/>
+        </p:nvSpPr>
+        <p:spPr>
+          <a:xfrm>
+            <a:off x="640080" y="1492758"/>
+            <a:ext cx="2545080" cy="1255395"/>
+          </a:xfrm>
+          <a:prstGeom prst="rect">
+            <a:avLst/>
+          </a:prstGeom>
+          <a:solidFill>
+            <a:srgbClr val="FFFFFF"/>
+          </a:solidFill>
+          <a:ln w="12700">
+            <a:solidFill>
+              <a:srgbClr val="D9D5CF"/>
+            </a:solidFill>
+            <a:prstDash val="solid"/>
+          </a:ln>
+        </p:spPr>
+      </p:sp>
+      <p:sp>
+        <p:nvSpPr>
+          <p:cNvPr id="5" name="Text 3"/>
           <p:cNvSpPr/>
           <p:nvPr/>
         </p:nvSpPr>
@@ -1020,7 +1045,32 @@
       </p:sp>
       <p:sp>
         <p:nvSpPr>
-          <p:cNvPr id="5" name="Text 3"/>
+          <p:cNvPr id="6" name="Shape 4"/>
+          <p:cNvSpPr/>
+          <p:nvPr/>
+        </p:nvSpPr>
+        <p:spPr>
+          <a:xfrm>
+            <a:off x="3299460" y="1492758"/>
+            <a:ext cx="2545080" cy="1255395"/>
+          </a:xfrm>
+          <a:prstGeom prst="rect">
+            <a:avLst/>
+          </a:prstGeom>
+          <a:solidFill>
+            <a:srgbClr val="FFFFFF"/>
+          </a:solidFill>
+          <a:ln w="12700">
+            <a:solidFill>
+              <a:srgbClr val="D9D5CF"/>
+            </a:solidFill>
+            <a:prstDash val="solid"/>
+          </a:ln>
+        </p:spPr>
+      </p:sp>
+      <p:sp>
+        <p:nvSpPr>
+          <p:cNvPr id="7" name="Text 5"/>
           <p:cNvSpPr/>
           <p:nvPr/>
         </p:nvSpPr>
@@ -1059,7 +1109,32 @@
       </p:sp>
       <p:sp>
         <p:nvSpPr>
-          <p:cNvPr id="6" name="Text 4"/>
+          <p:cNvPr id="8" name="Shape 6"/>
+          <p:cNvSpPr/>
+          <p:nvPr/>
+        </p:nvSpPr>
+        <p:spPr>
+          <a:xfrm>
+            <a:off x="5958840" y="1492758"/>
+            <a:ext cx="2545080" cy="1255395"/>
+          </a:xfrm>
+          <a:prstGeom prst="rect">
+            <a:avLst/>
+          </a:prstGeom>
+          <a:solidFill>
+            <a:srgbClr val="FFFFFF"/>
+          </a:solidFill>
+          <a:ln w="12700">
+            <a:solidFill>
+              <a:srgbClr val="D9D5CF"/>
+            </a:solidFill>
+            <a:prstDash val="solid"/>
+          </a:ln>
+        </p:spPr>
+      </p:sp>
+      <p:sp>
+        <p:nvSpPr>
+          <p:cNvPr id="9" name="Text 7"/>
           <p:cNvSpPr/>
           <p:nvPr/>
         </p:nvSpPr>
@@ -1098,7 +1173,32 @@
       </p:sp>
       <p:sp>
         <p:nvSpPr>
-          <p:cNvPr id="7" name="Text 5"/>
+          <p:cNvPr id="10" name="Shape 8"/>
+          <p:cNvSpPr/>
+          <p:nvPr/>
+        </p:nvSpPr>
+        <p:spPr>
+          <a:xfrm>
+            <a:off x="640080" y="2862453"/>
+            <a:ext cx="2545080" cy="1255395"/>
+          </a:xfrm>
+          <a:prstGeom prst="rect">
+            <a:avLst/>
+          </a:prstGeom>
+          <a:solidFill>
+            <a:srgbClr val="FFFFFF"/>
+          </a:solidFill>
+          <a:ln w="12700">
+            <a:solidFill>
+              <a:srgbClr val="D9D5CF"/>
+            </a:solidFill>
+            <a:prstDash val="solid"/>
+          </a:ln>
+        </p:spPr>
+      </p:sp>
+      <p:sp>
+        <p:nvSpPr>
+          <p:cNvPr id="11" name="Text 9"/>
           <p:cNvSpPr/>
           <p:nvPr/>
         </p:nvSpPr>
@@ -1137,7 +1237,32 @@
       </p:sp>
       <p:sp>
         <p:nvSpPr>
-          <p:cNvPr id="8" name="Text 6"/>
+          <p:cNvPr id="12" name="Shape 10"/>
+          <p:cNvSpPr/>
+          <p:nvPr/>
+        </p:nvSpPr>
+        <p:spPr>
+          <a:xfrm>
+            <a:off x="3299460" y="2862453"/>
+            <a:ext cx="2545080" cy="1255395"/>
+          </a:xfrm>
+          <a:prstGeom prst="rect">
+            <a:avLst/>
+          </a:prstGeom>
+          <a:solidFill>
+            <a:srgbClr val="FFFFFF"/>
+          </a:solidFill>
+          <a:ln w="12700">
+            <a:solidFill>
+              <a:srgbClr val="D9D5CF"/>
+            </a:solidFill>
+            <a:prstDash val="solid"/>
+          </a:ln>
+        </p:spPr>
+      </p:sp>
+      <p:sp>
+        <p:nvSpPr>
+          <p:cNvPr id="13" name="Text 11"/>
           <p:cNvSpPr/>
           <p:nvPr/>
         </p:nvSpPr>
@@ -1176,7 +1301,7 @@
       </p:sp>
       <p:sp>
         <p:nvSpPr>
-          <p:cNvPr id="9" name="Text 7"/>
+          <p:cNvPr id="14" name="Text 12"/>
           <p:cNvSpPr/>
           <p:nvPr/>
         </p:nvSpPr>

--- a/tests/benchmark/architectural_slides/case_027_metric_cards_only/output.pptx
+++ b/tests/benchmark/architectural_slides/case_027_metric_cards_only/output.pptx
@@ -910,7 +910,7 @@
         <p:spPr>
           <a:xfrm>
             <a:off x="640080" y="411480"/>
-            <a:ext cx="7863840" cy="601218"/>
+            <a:ext cx="7863840" cy="621792"/>
           </a:xfrm>
           <a:prstGeom prst="rect">
             <a:avLst/>
@@ -948,7 +948,7 @@
         </p:nvSpPr>
         <p:spPr>
           <a:xfrm>
-            <a:off x="640080" y="1050798"/>
+            <a:off x="640080" y="1071372"/>
             <a:ext cx="7863840" cy="365760"/>
           </a:xfrm>
           <a:prstGeom prst="rect">
@@ -987,8 +987,8 @@
         </p:nvSpPr>
         <p:spPr>
           <a:xfrm>
-            <a:off x="640080" y="1492758"/>
-            <a:ext cx="2545080" cy="1255395"/>
+            <a:off x="640080" y="1513332"/>
+            <a:ext cx="2545080" cy="1245108"/>
           </a:xfrm>
           <a:prstGeom prst="rect">
             <a:avLst/>
@@ -1012,8 +1012,8 @@
         </p:nvSpPr>
         <p:spPr>
           <a:xfrm>
-            <a:off x="640080" y="1492758"/>
-            <a:ext cx="2545080" cy="1255395"/>
+            <a:off x="640080" y="1513332"/>
+            <a:ext cx="2545080" cy="1245108"/>
           </a:xfrm>
           <a:prstGeom prst="rect">
             <a:avLst/>
@@ -1051,8 +1051,8 @@
         </p:nvSpPr>
         <p:spPr>
           <a:xfrm>
-            <a:off x="3299460" y="1492758"/>
-            <a:ext cx="2545080" cy="1255395"/>
+            <a:off x="3299460" y="1513332"/>
+            <a:ext cx="2545080" cy="1245108"/>
           </a:xfrm>
           <a:prstGeom prst="rect">
             <a:avLst/>
@@ -1076,8 +1076,8 @@
         </p:nvSpPr>
         <p:spPr>
           <a:xfrm>
-            <a:off x="3299460" y="1492758"/>
-            <a:ext cx="2545080" cy="1255395"/>
+            <a:off x="3299460" y="1513332"/>
+            <a:ext cx="2545080" cy="1245108"/>
           </a:xfrm>
           <a:prstGeom prst="rect">
             <a:avLst/>
@@ -1115,8 +1115,8 @@
         </p:nvSpPr>
         <p:spPr>
           <a:xfrm>
-            <a:off x="5958840" y="1492758"/>
-            <a:ext cx="2545080" cy="1255395"/>
+            <a:off x="5958840" y="1513332"/>
+            <a:ext cx="2545080" cy="1245108"/>
           </a:xfrm>
           <a:prstGeom prst="rect">
             <a:avLst/>
@@ -1140,8 +1140,8 @@
         </p:nvSpPr>
         <p:spPr>
           <a:xfrm>
-            <a:off x="5958840" y="1492758"/>
-            <a:ext cx="2545080" cy="1255395"/>
+            <a:off x="5958840" y="1513332"/>
+            <a:ext cx="2545080" cy="1245108"/>
           </a:xfrm>
           <a:prstGeom prst="rect">
             <a:avLst/>
@@ -1179,8 +1179,8 @@
         </p:nvSpPr>
         <p:spPr>
           <a:xfrm>
-            <a:off x="640080" y="2862453"/>
-            <a:ext cx="2545080" cy="1255395"/>
+            <a:off x="640080" y="2872740"/>
+            <a:ext cx="2545080" cy="1245108"/>
           </a:xfrm>
           <a:prstGeom prst="rect">
             <a:avLst/>
@@ -1204,8 +1204,8 @@
         </p:nvSpPr>
         <p:spPr>
           <a:xfrm>
-            <a:off x="640080" y="2862453"/>
-            <a:ext cx="2545080" cy="1255395"/>
+            <a:off x="640080" y="2872740"/>
+            <a:ext cx="2545080" cy="1245108"/>
           </a:xfrm>
           <a:prstGeom prst="rect">
             <a:avLst/>
@@ -1243,8 +1243,8 @@
         </p:nvSpPr>
         <p:spPr>
           <a:xfrm>
-            <a:off x="3299460" y="2862453"/>
-            <a:ext cx="2545080" cy="1255395"/>
+            <a:off x="3299460" y="2872740"/>
+            <a:ext cx="2545080" cy="1245108"/>
           </a:xfrm>
           <a:prstGeom prst="rect">
             <a:avLst/>
@@ -1268,8 +1268,8 @@
         </p:nvSpPr>
         <p:spPr>
           <a:xfrm>
-            <a:off x="3299460" y="2862453"/>
-            <a:ext cx="2545080" cy="1255395"/>
+            <a:off x="3299460" y="2872740"/>
+            <a:ext cx="2545080" cy="1245108"/>
           </a:xfrm>
           <a:prstGeom prst="rect">
             <a:avLst/>

--- a/tests/benchmark/architectural_slides/case_027_metric_cards_only/output.pptx
+++ b/tests/benchmark/architectural_slides/case_027_metric_cards_only/output.pptx
@@ -910,7 +910,7 @@
         <p:spPr>
           <a:xfrm>
             <a:off x="640080" y="411480"/>
-            <a:ext cx="7863840" cy="621792"/>
+            <a:ext cx="7863840" cy="601218"/>
           </a:xfrm>
           <a:prstGeom prst="rect">
             <a:avLst/>
@@ -948,7 +948,7 @@
         </p:nvSpPr>
         <p:spPr>
           <a:xfrm>
-            <a:off x="640080" y="1071372"/>
+            <a:off x="640080" y="1050798"/>
             <a:ext cx="7863840" cy="365760"/>
           </a:xfrm>
           <a:prstGeom prst="rect">
@@ -987,8 +987,8 @@
         </p:nvSpPr>
         <p:spPr>
           <a:xfrm>
-            <a:off x="640080" y="1513332"/>
-            <a:ext cx="2545080" cy="1245108"/>
+            <a:off x="640080" y="1492758"/>
+            <a:ext cx="2545080" cy="1255395"/>
           </a:xfrm>
           <a:prstGeom prst="rect">
             <a:avLst/>
@@ -1012,8 +1012,8 @@
         </p:nvSpPr>
         <p:spPr>
           <a:xfrm>
-            <a:off x="640080" y="1513332"/>
-            <a:ext cx="2545080" cy="1245108"/>
+            <a:off x="640080" y="1492758"/>
+            <a:ext cx="2545080" cy="1255395"/>
           </a:xfrm>
           <a:prstGeom prst="rect">
             <a:avLst/>
@@ -1051,8 +1051,8 @@
         </p:nvSpPr>
         <p:spPr>
           <a:xfrm>
-            <a:off x="3299460" y="1513332"/>
-            <a:ext cx="2545080" cy="1245108"/>
+            <a:off x="3299460" y="1492758"/>
+            <a:ext cx="2545080" cy="1255395"/>
           </a:xfrm>
           <a:prstGeom prst="rect">
             <a:avLst/>
@@ -1076,8 +1076,8 @@
         </p:nvSpPr>
         <p:spPr>
           <a:xfrm>
-            <a:off x="3299460" y="1513332"/>
-            <a:ext cx="2545080" cy="1245108"/>
+            <a:off x="3299460" y="1492758"/>
+            <a:ext cx="2545080" cy="1255395"/>
           </a:xfrm>
           <a:prstGeom prst="rect">
             <a:avLst/>
@@ -1115,8 +1115,8 @@
         </p:nvSpPr>
         <p:spPr>
           <a:xfrm>
-            <a:off x="5958840" y="1513332"/>
-            <a:ext cx="2545080" cy="1245108"/>
+            <a:off x="5958840" y="1492758"/>
+            <a:ext cx="2545080" cy="1255395"/>
           </a:xfrm>
           <a:prstGeom prst="rect">
             <a:avLst/>
@@ -1140,8 +1140,8 @@
         </p:nvSpPr>
         <p:spPr>
           <a:xfrm>
-            <a:off x="5958840" y="1513332"/>
-            <a:ext cx="2545080" cy="1245108"/>
+            <a:off x="5958840" y="1492758"/>
+            <a:ext cx="2545080" cy="1255395"/>
           </a:xfrm>
           <a:prstGeom prst="rect">
             <a:avLst/>
@@ -1179,8 +1179,8 @@
         </p:nvSpPr>
         <p:spPr>
           <a:xfrm>
-            <a:off x="640080" y="2872740"/>
-            <a:ext cx="2545080" cy="1245108"/>
+            <a:off x="640080" y="2862453"/>
+            <a:ext cx="2545080" cy="1255395"/>
           </a:xfrm>
           <a:prstGeom prst="rect">
             <a:avLst/>
@@ -1204,8 +1204,8 @@
         </p:nvSpPr>
         <p:spPr>
           <a:xfrm>
-            <a:off x="640080" y="2872740"/>
-            <a:ext cx="2545080" cy="1245108"/>
+            <a:off x="640080" y="2862453"/>
+            <a:ext cx="2545080" cy="1255395"/>
           </a:xfrm>
           <a:prstGeom prst="rect">
             <a:avLst/>
@@ -1243,8 +1243,8 @@
         </p:nvSpPr>
         <p:spPr>
           <a:xfrm>
-            <a:off x="3299460" y="2872740"/>
-            <a:ext cx="2545080" cy="1245108"/>
+            <a:off x="3299460" y="2862453"/>
+            <a:ext cx="2545080" cy="1255395"/>
           </a:xfrm>
           <a:prstGeom prst="rect">
             <a:avLst/>
@@ -1268,8 +1268,8 @@
         </p:nvSpPr>
         <p:spPr>
           <a:xfrm>
-            <a:off x="3299460" y="2872740"/>
-            <a:ext cx="2545080" cy="1245108"/>
+            <a:off x="3299460" y="2862453"/>
+            <a:ext cx="2545080" cy="1255395"/>
           </a:xfrm>
           <a:prstGeom prst="rect">
             <a:avLst/>
